--- a/assets/pptx/catalog-254.pptx
+++ b/assets/pptx/catalog-254.pptx
@@ -3499,61 +3499,61 @@
                 <a:ea typeface="Ebrima"/>
                 <a:cs typeface="Ebrima"/>
               </a:rPr>
-              <a:t>እጸልያለሁ (3x) በፊቱ ወድቄ ለምኜ መች አፍሬ አውቃለሁ</a:t>
-            </a:r>
-          </a:p>
-          <a:p>
-            <a:pPr algn="ctr">
-              <a:lnSpc>
-                <a:spcPct val="125000"/>
-              </a:lnSpc>
-            </a:pPr>
-            <a:r>
-              <a:rPr sz="4000" b="0">
-                <a:solidFill>
-                  <a:srgbClr val="FFFFFF"/>
-                </a:solidFill>
-                <a:latin typeface="Ebrima"/>
-                <a:ea typeface="Ebrima"/>
-                <a:cs typeface="Ebrima"/>
-              </a:rPr>
-              <a:t>እጸልያለሁ (3x) በፊቱ ወድቄ ለምኜ ድልን አግኝቻለሁ</a:t>
-            </a:r>
-          </a:p>
-          <a:p>
-            <a:pPr algn="ctr">
-              <a:lnSpc>
-                <a:spcPct val="125000"/>
-              </a:lnSpc>
-            </a:pPr>
-            <a:r>
-              <a:rPr sz="4000" b="0">
-                <a:solidFill>
-                  <a:srgbClr val="FFFFFF"/>
-                </a:solidFill>
-                <a:latin typeface="Ebrima"/>
-                <a:ea typeface="Ebrima"/>
-                <a:cs typeface="Ebrima"/>
-              </a:rPr>
-              <a:t>እጸልያለሁ (3x) በፊቱ ወድቄ ለምኜ መልስን አግኝቻለሁ</a:t>
-            </a:r>
-          </a:p>
-          <a:p>
-            <a:pPr algn="ctr">
-              <a:lnSpc>
-                <a:spcPct val="125000"/>
-              </a:lnSpc>
-            </a:pPr>
-            <a:r>
-              <a:rPr sz="4000" b="0">
-                <a:solidFill>
-                  <a:srgbClr val="FFFFFF"/>
-                </a:solidFill>
-                <a:latin typeface="Ebrima"/>
-                <a:ea typeface="Ebrima"/>
-                <a:cs typeface="Ebrima"/>
-              </a:rPr>
-              <a:t>እጸልያለሁ (3x) በፊቱ ወድቄ ለምኜ እንደሚሰማ አምናለሁ</a:t>
+              <a:t>እጸልያለሁ 3x በፊቱ ወድቄ ለምኜ መች አፍሬ አውቃለሁ</a:t>
+            </a:r>
+          </a:p>
+          <a:p>
+            <a:pPr algn="ctr">
+              <a:lnSpc>
+                <a:spcPct val="125000"/>
+              </a:lnSpc>
+            </a:pPr>
+            <a:r>
+              <a:rPr sz="4000" b="0">
+                <a:solidFill>
+                  <a:srgbClr val="FFFFFF"/>
+                </a:solidFill>
+                <a:latin typeface="Ebrima"/>
+                <a:ea typeface="Ebrima"/>
+                <a:cs typeface="Ebrima"/>
+              </a:rPr>
+              <a:t>እጸልያለሁ 3x በፊቱ ወድቄ ለምኜ ድልን አግኝቻለሁ</a:t>
+            </a:r>
+          </a:p>
+          <a:p>
+            <a:pPr algn="ctr">
+              <a:lnSpc>
+                <a:spcPct val="125000"/>
+              </a:lnSpc>
+            </a:pPr>
+            <a:r>
+              <a:rPr sz="4000" b="0">
+                <a:solidFill>
+                  <a:srgbClr val="FFFFFF"/>
+                </a:solidFill>
+                <a:latin typeface="Ebrima"/>
+                <a:ea typeface="Ebrima"/>
+                <a:cs typeface="Ebrima"/>
+              </a:rPr>
+              <a:t>እጸልያለሁ 3x በፊቱ ወድቄ ለምኜ መልስን አግኝቻለሁ</a:t>
+            </a:r>
+          </a:p>
+          <a:p>
+            <a:pPr algn="ctr">
+              <a:lnSpc>
+                <a:spcPct val="125000"/>
+              </a:lnSpc>
+            </a:pPr>
+            <a:r>
+              <a:rPr sz="4000" b="0">
+                <a:solidFill>
+                  <a:srgbClr val="FFFFFF"/>
+                </a:solidFill>
+                <a:latin typeface="Ebrima"/>
+                <a:ea typeface="Ebrima"/>
+                <a:cs typeface="Ebrima"/>
+              </a:rPr>
+              <a:t>እጸልያለሁ 3x በፊቱ ወድቄ ለምኜ እንደሚሰማ አምናለሁ</a:t>
             </a:r>
           </a:p>
         </p:txBody>
@@ -4207,61 +4207,61 @@
                 <a:ea typeface="Ebrima"/>
                 <a:cs typeface="Ebrima"/>
               </a:rPr>
-              <a:t>እጸልያለሁ (3x) በፊቱ ወድቄ ለምኜ መች አፍሬ አውቃለሁ</a:t>
-            </a:r>
-          </a:p>
-          <a:p>
-            <a:pPr algn="ctr">
-              <a:lnSpc>
-                <a:spcPct val="125000"/>
-              </a:lnSpc>
-            </a:pPr>
-            <a:r>
-              <a:rPr sz="4000" b="0">
-                <a:solidFill>
-                  <a:srgbClr val="FFFFFF"/>
-                </a:solidFill>
-                <a:latin typeface="Ebrima"/>
-                <a:ea typeface="Ebrima"/>
-                <a:cs typeface="Ebrima"/>
-              </a:rPr>
-              <a:t>እጸልያለሁ (3x) በፊቱ ወድቄ ለምኜ ድልን አግኝቻለሁ</a:t>
-            </a:r>
-          </a:p>
-          <a:p>
-            <a:pPr algn="ctr">
-              <a:lnSpc>
-                <a:spcPct val="125000"/>
-              </a:lnSpc>
-            </a:pPr>
-            <a:r>
-              <a:rPr sz="4000" b="0">
-                <a:solidFill>
-                  <a:srgbClr val="FFFFFF"/>
-                </a:solidFill>
-                <a:latin typeface="Ebrima"/>
-                <a:ea typeface="Ebrima"/>
-                <a:cs typeface="Ebrima"/>
-              </a:rPr>
-              <a:t>እጸልያለሁ (3x) በፊቱ ወድቄ ለምኜ መልስን አግኝቻለሁ</a:t>
-            </a:r>
-          </a:p>
-          <a:p>
-            <a:pPr algn="ctr">
-              <a:lnSpc>
-                <a:spcPct val="125000"/>
-              </a:lnSpc>
-            </a:pPr>
-            <a:r>
-              <a:rPr sz="4000" b="0">
-                <a:solidFill>
-                  <a:srgbClr val="FFFFFF"/>
-                </a:solidFill>
-                <a:latin typeface="Ebrima"/>
-                <a:ea typeface="Ebrima"/>
-                <a:cs typeface="Ebrima"/>
-              </a:rPr>
-              <a:t>እጸልያለሁ (3x) በፊቱ ወድቄ ለምኜ እንደሚሰማ አምናለሁ</a:t>
+              <a:t>እጸልያለሁ 3x በፊቱ ወድቄ ለምኜ መች አፍሬ አውቃለሁ</a:t>
+            </a:r>
+          </a:p>
+          <a:p>
+            <a:pPr algn="ctr">
+              <a:lnSpc>
+                <a:spcPct val="125000"/>
+              </a:lnSpc>
+            </a:pPr>
+            <a:r>
+              <a:rPr sz="4000" b="0">
+                <a:solidFill>
+                  <a:srgbClr val="FFFFFF"/>
+                </a:solidFill>
+                <a:latin typeface="Ebrima"/>
+                <a:ea typeface="Ebrima"/>
+                <a:cs typeface="Ebrima"/>
+              </a:rPr>
+              <a:t>እጸልያለሁ 3x በፊቱ ወድቄ ለምኜ ድልን አግኝቻለሁ</a:t>
+            </a:r>
+          </a:p>
+          <a:p>
+            <a:pPr algn="ctr">
+              <a:lnSpc>
+                <a:spcPct val="125000"/>
+              </a:lnSpc>
+            </a:pPr>
+            <a:r>
+              <a:rPr sz="4000" b="0">
+                <a:solidFill>
+                  <a:srgbClr val="FFFFFF"/>
+                </a:solidFill>
+                <a:latin typeface="Ebrima"/>
+                <a:ea typeface="Ebrima"/>
+                <a:cs typeface="Ebrima"/>
+              </a:rPr>
+              <a:t>እጸልያለሁ 3x በፊቱ ወድቄ ለምኜ መልስን አግኝቻለሁ</a:t>
+            </a:r>
+          </a:p>
+          <a:p>
+            <a:pPr algn="ctr">
+              <a:lnSpc>
+                <a:spcPct val="125000"/>
+              </a:lnSpc>
+            </a:pPr>
+            <a:r>
+              <a:rPr sz="4000" b="0">
+                <a:solidFill>
+                  <a:srgbClr val="FFFFFF"/>
+                </a:solidFill>
+                <a:latin typeface="Ebrima"/>
+                <a:ea typeface="Ebrima"/>
+                <a:cs typeface="Ebrima"/>
+              </a:rPr>
+              <a:t>እጸልያለሁ 3x በፊቱ ወድቄ ለምኜ እንደሚሰማ አምናለሁ</a:t>
             </a:r>
           </a:p>
         </p:txBody>
@@ -4897,61 +4897,61 @@
                 <a:ea typeface="Ebrima"/>
                 <a:cs typeface="Ebrima"/>
               </a:rPr>
-              <a:t>እጸልያለሁ (3x) በፊቱ ወድቄ ለምኜ መች አፍሬ አውቃለሁ</a:t>
-            </a:r>
-          </a:p>
-          <a:p>
-            <a:pPr algn="ctr">
-              <a:lnSpc>
-                <a:spcPct val="125000"/>
-              </a:lnSpc>
-            </a:pPr>
-            <a:r>
-              <a:rPr sz="4000" b="0">
-                <a:solidFill>
-                  <a:srgbClr val="FFFFFF"/>
-                </a:solidFill>
-                <a:latin typeface="Ebrima"/>
-                <a:ea typeface="Ebrima"/>
-                <a:cs typeface="Ebrima"/>
-              </a:rPr>
-              <a:t>እጸልያለሁ (3x) በፊቱ ወድቄ ለምኜ ድልን አግኝቻለሁ</a:t>
-            </a:r>
-          </a:p>
-          <a:p>
-            <a:pPr algn="ctr">
-              <a:lnSpc>
-                <a:spcPct val="125000"/>
-              </a:lnSpc>
-            </a:pPr>
-            <a:r>
-              <a:rPr sz="4000" b="0">
-                <a:solidFill>
-                  <a:srgbClr val="FFFFFF"/>
-                </a:solidFill>
-                <a:latin typeface="Ebrima"/>
-                <a:ea typeface="Ebrima"/>
-                <a:cs typeface="Ebrima"/>
-              </a:rPr>
-              <a:t>እጸልያለሁ (3x) በፊቱ ወድቄ ለምኜ መልስን አግኝቻለሁ</a:t>
-            </a:r>
-          </a:p>
-          <a:p>
-            <a:pPr algn="ctr">
-              <a:lnSpc>
-                <a:spcPct val="125000"/>
-              </a:lnSpc>
-            </a:pPr>
-            <a:r>
-              <a:rPr sz="4000" b="0">
-                <a:solidFill>
-                  <a:srgbClr val="FFFFFF"/>
-                </a:solidFill>
-                <a:latin typeface="Ebrima"/>
-                <a:ea typeface="Ebrima"/>
-                <a:cs typeface="Ebrima"/>
-              </a:rPr>
-              <a:t>እጸልያለሁ (3x) በፊቱ ወድቄ ለምኜ እንደሚሰማ አምናለሁ</a:t>
+              <a:t>እጸልያለሁ 3x በፊቱ ወድቄ ለምኜ መች አፍሬ አውቃለሁ</a:t>
+            </a:r>
+          </a:p>
+          <a:p>
+            <a:pPr algn="ctr">
+              <a:lnSpc>
+                <a:spcPct val="125000"/>
+              </a:lnSpc>
+            </a:pPr>
+            <a:r>
+              <a:rPr sz="4000" b="0">
+                <a:solidFill>
+                  <a:srgbClr val="FFFFFF"/>
+                </a:solidFill>
+                <a:latin typeface="Ebrima"/>
+                <a:ea typeface="Ebrima"/>
+                <a:cs typeface="Ebrima"/>
+              </a:rPr>
+              <a:t>እጸልያለሁ 3x በፊቱ ወድቄ ለምኜ ድልን አግኝቻለሁ</a:t>
+            </a:r>
+          </a:p>
+          <a:p>
+            <a:pPr algn="ctr">
+              <a:lnSpc>
+                <a:spcPct val="125000"/>
+              </a:lnSpc>
+            </a:pPr>
+            <a:r>
+              <a:rPr sz="4000" b="0">
+                <a:solidFill>
+                  <a:srgbClr val="FFFFFF"/>
+                </a:solidFill>
+                <a:latin typeface="Ebrima"/>
+                <a:ea typeface="Ebrima"/>
+                <a:cs typeface="Ebrima"/>
+              </a:rPr>
+              <a:t>እጸልያለሁ 3x በፊቱ ወድቄ ለምኜ መልስን አግኝቻለሁ</a:t>
+            </a:r>
+          </a:p>
+          <a:p>
+            <a:pPr algn="ctr">
+              <a:lnSpc>
+                <a:spcPct val="125000"/>
+              </a:lnSpc>
+            </a:pPr>
+            <a:r>
+              <a:rPr sz="4000" b="0">
+                <a:solidFill>
+                  <a:srgbClr val="FFFFFF"/>
+                </a:solidFill>
+                <a:latin typeface="Ebrima"/>
+                <a:ea typeface="Ebrima"/>
+                <a:cs typeface="Ebrima"/>
+              </a:rPr>
+              <a:t>እጸልያለሁ 3x በፊቱ ወድቄ ለምኜ እንደሚሰማ አምናለሁ</a:t>
             </a:r>
           </a:p>
         </p:txBody>
